--- a/DynamicsMinds2026_NeillRiordan_JoseAzevedo_Architecting_ERP_in_the_Age_of_AI.pptx
+++ b/DynamicsMinds2026_NeillRiordan_JoseAzevedo_Architecting_ERP_in_the_Age_of_AI.pptx
@@ -17143,7 +17143,7 @@
                 <a:ea typeface="Calibri" pitchFamily="34" charset="-122"/>
                 <a:cs typeface="Calibri" pitchFamily="34" charset="-120"/>
               </a:rPr>
-              <a:t>Same six spokes. Every one of them is being filled with new tools, new tradeoffs, new craft.</a:t>
+              <a:t>Same eight spokes. Every one of them is being filled with new tools, new tradeoffs, new craft.</a:t>
             </a:r>
             <a:endParaRPr lang="en-US" sz="1400" dirty="0"/>
           </a:p>
